--- a/examples/manufacturing/out/deck.pptx
+++ b/examples/manufacturing/out/deck.pptx
@@ -5959,42 +5959,6 @@
           </a:p>
         </p:txBody>
       </p:sp>
-      <p:sp>
-        <p:nvSpPr>
-          <p:cNvPr id="5" name="TextBox 4"/>
-          <p:cNvSpPr txBox="1"/>
-          <p:nvPr/>
-        </p:nvSpPr>
-        <p:spPr>
-          <a:xfrm>
-            <a:off x="731520" y="4114800"/>
-            <a:ext cx="8229600" cy="457200"/>
-          </a:xfrm>
-          <a:prstGeom prst="rect">
-            <a:avLst/>
-          </a:prstGeom>
-          <a:noFill/>
-        </p:spPr>
-        <p:txBody>
-          <a:bodyPr wrap="square" anchor="t">
-            <a:spAutoFit/>
-          </a:bodyPr>
-          <a:lstStyle/>
-          <a:p>
-            <a:pPr algn="l"/>
-            <a:r>
-              <a:rPr sz="1500" b="0">
-                <a:solidFill>
-                  <a:srgbClr val="9AA5B1"/>
-                </a:solidFill>
-                <a:latin typeface="微软雅黑"/>
-                <a:ea typeface="微软雅黑"/>
-              </a:rPr>
-              <a:t>SECTION SUBTITLE</a:t>
-            </a:r>
-          </a:p>
-        </p:txBody>
-      </p:sp>
     </p:spTree>
   </p:cSld>
   <p:clrMapOvr>
@@ -7804,42 +7768,6 @@
                 <a:ea typeface="微软雅黑"/>
               </a:rPr>
               <a:t>问题与不足</a:t>
-            </a:r>
-          </a:p>
-        </p:txBody>
-      </p:sp>
-      <p:sp>
-        <p:nvSpPr>
-          <p:cNvPr id="5" name="TextBox 4"/>
-          <p:cNvSpPr txBox="1"/>
-          <p:nvPr/>
-        </p:nvSpPr>
-        <p:spPr>
-          <a:xfrm>
-            <a:off x="731520" y="4114800"/>
-            <a:ext cx="8229600" cy="457200"/>
-          </a:xfrm>
-          <a:prstGeom prst="rect">
-            <a:avLst/>
-          </a:prstGeom>
-          <a:noFill/>
-        </p:spPr>
-        <p:txBody>
-          <a:bodyPr wrap="square" anchor="t">
-            <a:spAutoFit/>
-          </a:bodyPr>
-          <a:lstStyle/>
-          <a:p>
-            <a:pPr algn="l"/>
-            <a:r>
-              <a:rPr sz="1500" b="0">
-                <a:solidFill>
-                  <a:srgbClr val="9AA5B1"/>
-                </a:solidFill>
-                <a:latin typeface="微软雅黑"/>
-                <a:ea typeface="微软雅黑"/>
-              </a:rPr>
-              <a:t>SECTION SUBTITLE</a:t>
             </a:r>
           </a:p>
         </p:txBody>
@@ -9002,42 +8930,6 @@
           </a:p>
         </p:txBody>
       </p:sp>
-      <p:sp>
-        <p:nvSpPr>
-          <p:cNvPr id="5" name="TextBox 4"/>
-          <p:cNvSpPr txBox="1"/>
-          <p:nvPr/>
-        </p:nvSpPr>
-        <p:spPr>
-          <a:xfrm>
-            <a:off x="731520" y="4114800"/>
-            <a:ext cx="8229600" cy="457200"/>
-          </a:xfrm>
-          <a:prstGeom prst="rect">
-            <a:avLst/>
-          </a:prstGeom>
-          <a:noFill/>
-        </p:spPr>
-        <p:txBody>
-          <a:bodyPr wrap="square" anchor="t">
-            <a:spAutoFit/>
-          </a:bodyPr>
-          <a:lstStyle/>
-          <a:p>
-            <a:pPr algn="l"/>
-            <a:r>
-              <a:rPr sz="1500" b="0">
-                <a:solidFill>
-                  <a:srgbClr val="9AA5B1"/>
-                </a:solidFill>
-                <a:latin typeface="微软雅黑"/>
-                <a:ea typeface="微软雅黑"/>
-              </a:rPr>
-              <a:t>SECTION SUBTITLE</a:t>
-            </a:r>
-          </a:p>
-        </p:txBody>
-      </p:sp>
     </p:spTree>
   </p:cSld>
   <p:clrMapOvr>
@@ -11142,42 +11034,6 @@
                 <a:ea typeface="微软雅黑"/>
               </a:rPr>
               <a:t>建设成效</a:t>
-            </a:r>
-          </a:p>
-        </p:txBody>
-      </p:sp>
-      <p:sp>
-        <p:nvSpPr>
-          <p:cNvPr id="5" name="TextBox 4"/>
-          <p:cNvSpPr txBox="1"/>
-          <p:nvPr/>
-        </p:nvSpPr>
-        <p:spPr>
-          <a:xfrm>
-            <a:off x="731520" y="4114800"/>
-            <a:ext cx="8229600" cy="457200"/>
-          </a:xfrm>
-          <a:prstGeom prst="rect">
-            <a:avLst/>
-          </a:prstGeom>
-          <a:noFill/>
-        </p:spPr>
-        <p:txBody>
-          <a:bodyPr wrap="square" anchor="t">
-            <a:spAutoFit/>
-          </a:bodyPr>
-          <a:lstStyle/>
-          <a:p>
-            <a:pPr algn="l"/>
-            <a:r>
-              <a:rPr sz="1500" b="0">
-                <a:solidFill>
-                  <a:srgbClr val="9AA5B1"/>
-                </a:solidFill>
-                <a:latin typeface="微软雅黑"/>
-                <a:ea typeface="微软雅黑"/>
-              </a:rPr>
-              <a:t>SECTION SUBTITLE</a:t>
             </a:r>
           </a:p>
         </p:txBody>

--- a/examples/manufacturing/out/deck.pptx
+++ b/examples/manufacturing/out/deck.pptx
@@ -4900,8 +4900,8 @@
         </p:nvSpPr>
         <p:spPr>
           <a:xfrm>
-            <a:off x="1143000" y="2683700"/>
-            <a:ext cx="2331720" cy="841375"/>
+            <a:off x="1143000" y="2691638"/>
+            <a:ext cx="2331720" cy="825500"/>
           </a:xfrm>
           <a:prstGeom prst="rect">
             <a:avLst/>
@@ -4918,7 +4918,7 @@
               </a:lnSpc>
             </a:pPr>
             <a:r>
-              <a:rPr sz="5300" b="1">
+              <a:rPr sz="5200" b="1">
                 <a:solidFill>
                   <a:srgbClr val="9A4C22"/>
                 </a:solidFill>
@@ -4950,7 +4950,7 @@
         </p:nvCxnSpPr>
         <p:spPr>
           <a:xfrm>
-            <a:off x="1143000" y="3662236"/>
+            <a:off x="1143000" y="3654298"/>
             <a:ext cx="640080" cy="0"/>
           </a:xfrm>
           <a:prstGeom prst="line">
@@ -4985,7 +4985,7 @@
         </p:nvSpPr>
         <p:spPr>
           <a:xfrm>
-            <a:off x="1143000" y="3845116"/>
+            <a:off x="1143000" y="3837178"/>
             <a:ext cx="2286000" cy="457200"/>
           </a:xfrm>
           <a:prstGeom prst="rect">
@@ -5024,8 +5024,8 @@
         </p:nvSpPr>
         <p:spPr>
           <a:xfrm>
-            <a:off x="3886200" y="2683700"/>
-            <a:ext cx="2057400" cy="841375"/>
+            <a:off x="3886200" y="2691638"/>
+            <a:ext cx="2057400" cy="825500"/>
           </a:xfrm>
           <a:prstGeom prst="rect">
             <a:avLst/>
@@ -5042,7 +5042,7 @@
               </a:lnSpc>
             </a:pPr>
             <a:r>
-              <a:rPr sz="5300" b="1">
+              <a:rPr sz="5200" b="1">
                 <a:solidFill>
                   <a:srgbClr val="9A4C22"/>
                 </a:solidFill>
@@ -5074,7 +5074,7 @@
         </p:nvCxnSpPr>
         <p:spPr>
           <a:xfrm>
-            <a:off x="3886200" y="3662236"/>
+            <a:off x="3886200" y="3654298"/>
             <a:ext cx="640080" cy="0"/>
           </a:xfrm>
           <a:prstGeom prst="line">
@@ -5109,7 +5109,7 @@
         </p:nvSpPr>
         <p:spPr>
           <a:xfrm>
-            <a:off x="3886200" y="3845116"/>
+            <a:off x="3886200" y="3837178"/>
             <a:ext cx="2011680" cy="457200"/>
           </a:xfrm>
           <a:prstGeom prst="rect">
@@ -5148,8 +5148,8 @@
         </p:nvCxnSpPr>
         <p:spPr>
           <a:xfrm>
-            <a:off x="3611880" y="2820860"/>
-            <a:ext cx="0" cy="1481455"/>
+            <a:off x="3611880" y="2828798"/>
+            <a:ext cx="0" cy="1465580"/>
           </a:xfrm>
           <a:prstGeom prst="line">
             <a:avLst/>
@@ -5183,8 +5183,8 @@
         </p:nvSpPr>
         <p:spPr>
           <a:xfrm>
-            <a:off x="6355080" y="2683700"/>
-            <a:ext cx="2057400" cy="841375"/>
+            <a:off x="6355080" y="2691638"/>
+            <a:ext cx="2057400" cy="825500"/>
           </a:xfrm>
           <a:prstGeom prst="rect">
             <a:avLst/>
@@ -5201,7 +5201,7 @@
               </a:lnSpc>
             </a:pPr>
             <a:r>
-              <a:rPr sz="5300" b="1">
+              <a:rPr sz="5200" b="1">
                 <a:solidFill>
                   <a:srgbClr val="9A4C22"/>
                 </a:solidFill>
@@ -5233,7 +5233,7 @@
         </p:nvCxnSpPr>
         <p:spPr>
           <a:xfrm>
-            <a:off x="6355080" y="3662236"/>
+            <a:off x="6355080" y="3654298"/>
             <a:ext cx="640080" cy="0"/>
           </a:xfrm>
           <a:prstGeom prst="line">
@@ -5268,7 +5268,7 @@
         </p:nvSpPr>
         <p:spPr>
           <a:xfrm>
-            <a:off x="6355080" y="3845116"/>
+            <a:off x="6355080" y="3837178"/>
             <a:ext cx="2011680" cy="457200"/>
           </a:xfrm>
           <a:prstGeom prst="rect">
@@ -5307,8 +5307,8 @@
         </p:nvCxnSpPr>
         <p:spPr>
           <a:xfrm>
-            <a:off x="6080760" y="2820860"/>
-            <a:ext cx="0" cy="1481455"/>
+            <a:off x="6080760" y="2828798"/>
+            <a:ext cx="0" cy="1465580"/>
           </a:xfrm>
           <a:prstGeom prst="line">
             <a:avLst/>
@@ -5342,8 +5342,8 @@
         </p:nvSpPr>
         <p:spPr>
           <a:xfrm>
-            <a:off x="8823960" y="2683700"/>
-            <a:ext cx="2057400" cy="841375"/>
+            <a:off x="8823960" y="2691638"/>
+            <a:ext cx="2057400" cy="825500"/>
           </a:xfrm>
           <a:prstGeom prst="rect">
             <a:avLst/>
@@ -5360,7 +5360,7 @@
               </a:lnSpc>
             </a:pPr>
             <a:r>
-              <a:rPr sz="5300" b="1">
+              <a:rPr sz="5200" b="1">
                 <a:solidFill>
                   <a:srgbClr val="9A4C22"/>
                 </a:solidFill>
@@ -5392,7 +5392,7 @@
         </p:nvCxnSpPr>
         <p:spPr>
           <a:xfrm>
-            <a:off x="8823960" y="3662236"/>
+            <a:off x="8823960" y="3654298"/>
             <a:ext cx="640080" cy="0"/>
           </a:xfrm>
           <a:prstGeom prst="line">
@@ -5427,7 +5427,7 @@
         </p:nvSpPr>
         <p:spPr>
           <a:xfrm>
-            <a:off x="8823960" y="3845116"/>
+            <a:off x="8823960" y="3837178"/>
             <a:ext cx="2011680" cy="457200"/>
           </a:xfrm>
           <a:prstGeom prst="rect">
@@ -5466,8 +5466,8 @@
         </p:nvCxnSpPr>
         <p:spPr>
           <a:xfrm>
-            <a:off x="8549640" y="2820860"/>
-            <a:ext cx="0" cy="1481455"/>
+            <a:off x="8549640" y="2828798"/>
+            <a:ext cx="0" cy="1465580"/>
           </a:xfrm>
           <a:prstGeom prst="line">
             <a:avLst/>
